--- a/presentation/module-federation.pptx
+++ b/presentation/module-federation.pptx
@@ -973,70 +973,14 @@
           <a:bodyPr/>
           <a:lstStyle/>
           <a:p>
-            <a:pPr rtl="0"/>
-            <a:r>
-              <a:rPr lang="en-US" dirty="0"/>
-              <a:t>The different ports are just a local dev artifact — three dev servers can't all bind port 3000 on one laptop — and they vanish on deploy. </a:t>
-            </a:r>
-          </a:p>
-          <a:p>
-            <a:pPr rtl="0"/>
-            <a:endParaRPr lang="en-US" dirty="0"/>
-          </a:p>
-          <a:p>
-            <a:pPr rtl="0"/>
-            <a:r>
-              <a:rPr lang="en-US" dirty="0"/>
-              <a:t>In production the browser only ever sees </a:t>
-            </a:r>
-            <a:r>
-              <a:rPr lang="en-US" sz="1200" kern="1200" dirty="0">
-                <a:solidFill>
-                  <a:schemeClr val="tx1"/>
-                </a:solidFill>
-                <a:latin typeface="+mn-lt"/>
-                <a:ea typeface="+mn-ea"/>
-                <a:cs typeface="+mn-cs"/>
-              </a:rPr>
-              <a:t>acme.com</a:t>
-            </a:r>
-            <a:r>
-              <a:rPr lang="en-US" dirty="0"/>
-              <a:t>, with a router at the edge (a Vercel rewrite, a CloudFront behavior, an nginx </a:t>
-            </a:r>
-            <a:r>
-              <a:rPr lang="en-US" sz="1200" kern="1200" dirty="0" err="1">
-                <a:solidFill>
-                  <a:schemeClr val="tx1"/>
-                </a:solidFill>
-                <a:latin typeface="+mn-lt"/>
-                <a:ea typeface="+mn-ea"/>
-                <a:cs typeface="+mn-cs"/>
-              </a:rPr>
-              <a:t>proxy_pass</a:t>
-            </a:r>
-            <a:r>
-              <a:rPr lang="en-US" dirty="0"/>
-              <a:t>, a Cloudflare Worker) mapping each path to the host where that team deploys, so users stay on one origin while each team still ships on its own schedule. </a:t>
-            </a:r>
-          </a:p>
-          <a:p>
-            <a:pPr rtl="0"/>
-            <a:endParaRPr lang="en-US" dirty="0"/>
-          </a:p>
-          <a:p>
-            <a:pPr rtl="0"/>
-            <a:r>
-              <a:rPr lang="en-US" dirty="0"/>
-              <a:t>Those deploy targets are free: every platform hands you a hostname, and subdomains of a domain you already own are just DNS records, not purchases. One domain, three paths, nothing extra to buy.</a:t>
-            </a:r>
+            <a:endParaRPr lang="en-GB" dirty="0"/>
           </a:p>
         </p:txBody>
       </p:sp>
     </p:spTree>
     <p:extLst>
       <p:ext uri="{BB962C8B-B14F-4D97-AF65-F5344CB8AC3E}">
-        <p14:creationId xmlns:p14="http://schemas.microsoft.com/office/powerpoint/2010/main" val="108089564"/>
+        <p14:creationId xmlns:p14="http://schemas.microsoft.com/office/powerpoint/2010/main" val="3590104412"/>
       </p:ext>
     </p:extLst>
   </p:cSld>
@@ -1112,29 +1056,70 @@
           <a:bodyPr/>
           <a:lstStyle/>
           <a:p>
+            <a:pPr rtl="0"/>
             <a:r>
               <a:rPr lang="en-US" dirty="0"/>
-              <a:t>Module Federation is for developers and teams. It gives you independent builds and independent deploys. Onboarding improvements.</a:t>
-            </a:r>
-          </a:p>
-          <a:p>
+              <a:t>The different ports are just a local dev artifact — three dev servers can't all bind port 3000 on one laptop — and they disappear on deployment. </a:t>
+            </a:r>
+          </a:p>
+          <a:p>
+            <a:pPr rtl="0"/>
             <a:endParaRPr lang="en-US" dirty="0"/>
           </a:p>
           <a:p>
+            <a:pPr rtl="0"/>
             <a:r>
               <a:rPr lang="en-US" dirty="0"/>
-              <a:t>Suspense and skeletons are for end users. They experience perceived instant load and no blank screens at runtime.</a:t>
-            </a:r>
-          </a:p>
-          <a:p>
-            <a:endParaRPr lang="en-GB" dirty="0"/>
+              <a:t>In production the browser only ever sees </a:t>
+            </a:r>
+            <a:r>
+              <a:rPr lang="en-US" sz="1200" kern="1200" dirty="0">
+                <a:solidFill>
+                  <a:schemeClr val="tx1"/>
+                </a:solidFill>
+                <a:latin typeface="+mn-lt"/>
+                <a:ea typeface="+mn-ea"/>
+                <a:cs typeface="+mn-cs"/>
+              </a:rPr>
+              <a:t>acme.com</a:t>
+            </a:r>
+            <a:r>
+              <a:rPr lang="en-US" dirty="0"/>
+              <a:t>, with a router at the edge (a Vercel rewrite, a CloudFront behavior, an nginx </a:t>
+            </a:r>
+            <a:r>
+              <a:rPr lang="en-US" sz="1200" kern="1200" dirty="0" err="1">
+                <a:solidFill>
+                  <a:schemeClr val="tx1"/>
+                </a:solidFill>
+                <a:latin typeface="+mn-lt"/>
+                <a:ea typeface="+mn-ea"/>
+                <a:cs typeface="+mn-cs"/>
+              </a:rPr>
+              <a:t>proxy_pass</a:t>
+            </a:r>
+            <a:r>
+              <a:rPr lang="en-US" dirty="0"/>
+              <a:t>, a Cloudflare Worker) mapping each path to the host where that team deploys, so users stay on one origin while each team still ships on its own schedule. </a:t>
+            </a:r>
+          </a:p>
+          <a:p>
+            <a:pPr rtl="0"/>
+            <a:endParaRPr lang="en-US" dirty="0"/>
+          </a:p>
+          <a:p>
+            <a:pPr rtl="0"/>
+            <a:r>
+              <a:rPr lang="en-US" dirty="0"/>
+              <a:t>Those deploy targets are free: every platform gives you a hostname, and subdomains of a domain you already own are just DNS records. One domain with three paths.</a:t>
+            </a:r>
           </a:p>
         </p:txBody>
       </p:sp>
     </p:spTree>
     <p:extLst>
       <p:ext uri="{BB962C8B-B14F-4D97-AF65-F5344CB8AC3E}">
-        <p14:creationId xmlns:p14="http://schemas.microsoft.com/office/powerpoint/2010/main" val="447115205"/>
+        <p14:creationId xmlns:p14="http://schemas.microsoft.com/office/powerpoint/2010/main" val="108089564"/>
       </p:ext>
     </p:extLst>
   </p:cSld>
@@ -1212,7 +1197,7 @@
           <a:p>
             <a:r>
               <a:rPr lang="en-US" dirty="0"/>
-              <a:t>You can have one without the other. Plenty of teams do. You can federate four remotes and still show a blank screen and a spinner every time someone clicks a tab. That is slow user experience even when team ownership is solid.</a:t>
+              <a:t>Module Federation is for developers and teams. It gives you independent builds and independent deploys. Onboarding improvements.</a:t>
             </a:r>
           </a:p>
           <a:p>
@@ -1221,7 +1206,7 @@
           <a:p>
             <a:r>
               <a:rPr lang="en-US" dirty="0"/>
-              <a:t>With Suspense, the user clicks a tab, a skeleton appears immediately, and the content resolves when it is ready. Each remote owns its own loading choreography.</a:t>
+              <a:t>Suspense and skeletons are for end users. They experience perceived instant load and no blank screens at runtime.</a:t>
             </a:r>
           </a:p>
           <a:p>
@@ -1232,7 +1217,7 @@
     </p:spTree>
     <p:extLst>
       <p:ext uri="{BB962C8B-B14F-4D97-AF65-F5344CB8AC3E}">
-        <p14:creationId xmlns:p14="http://schemas.microsoft.com/office/powerpoint/2010/main" val="2672093464"/>
+        <p14:creationId xmlns:p14="http://schemas.microsoft.com/office/powerpoint/2010/main" val="447115205"/>
       </p:ext>
     </p:extLst>
   </p:cSld>
@@ -1310,7 +1295,7 @@
           <a:p>
             <a:r>
               <a:rPr lang="en-US" dirty="0"/>
-              <a:t>This is the shape of the app. One shell on port 3000. The shell owns navigation, the router, the theme, the counter, and the logged user.</a:t>
+              <a:t>Module Federation does not give you Suspense for free. Plenty of teams federate four remotes and still show a blank screen and a spinner every time someone clicks a tab. Clean team ownership, slow user experience.</a:t>
             </a:r>
           </a:p>
           <a:p>
@@ -1319,19 +1304,8 @@
           <a:p>
             <a:r>
               <a:rPr lang="en-US" dirty="0"/>
-              <a:t>Every remote is wrapped the same way. An error boundary. Then Suspense with a skeleton fallback. Then the remote module itself.</a:t>
-            </a:r>
-          </a:p>
-          <a:p>
-            <a:endParaRPr lang="en-US" dirty="0"/>
-          </a:p>
-          <a:p>
-            <a:r>
-              <a:rPr lang="en-US" dirty="0"/>
-              <a:t>Four remotes hang off that shell. Not every module should load the same way if you want something like this. The strategy will depend on which content you will prioritize.</a:t>
-            </a:r>
-          </a:p>
-          <a:p>
+              <a:t>With Suspense, the user clicks a tab, a skeleton appears instantly, and the content replaces it when it is ready. The host draws the skeleton; each remote decides when it is ready.</a:t>
+            </a:r>
             <a:endParaRPr lang="en-GB" dirty="0"/>
           </a:p>
         </p:txBody>
@@ -1339,7 +1313,7 @@
     </p:spTree>
     <p:extLst>
       <p:ext uri="{BB962C8B-B14F-4D97-AF65-F5344CB8AC3E}">
-        <p14:creationId xmlns:p14="http://schemas.microsoft.com/office/powerpoint/2010/main" val="1899568420"/>
+        <p14:creationId xmlns:p14="http://schemas.microsoft.com/office/powerpoint/2010/main" val="2672093464"/>
       </p:ext>
     </p:extLst>
   </p:cSld>
@@ -1417,7 +1391,7 @@
           <a:p>
             <a:r>
               <a:rPr lang="en-US" dirty="0"/>
-              <a:t>Prescriptions and Analytics are streamed. They load on demand, behind per-module skeletons.</a:t>
+              <a:t>This is the shape of the app. One shell on port 3000. The shell owns navigation, the router, the theme, the counter, and the logged user.</a:t>
             </a:r>
           </a:p>
           <a:p>
@@ -1426,7 +1400,16 @@
           <a:p>
             <a:r>
               <a:rPr lang="en-US" dirty="0"/>
-              <a:t>Every strategy still gets three layers of resilience. A catch on lazy, so an unreachable remote becomes a fallback instead of a white screen. Suspense, so a loading remote shows its own skeleton. An error boundary, so a runtime crash in one remote does not take down the app.</a:t>
+              <a:t>Every remote is wrapped the same way. An error boundary. Then Suspense with a skeleton fallback. Then the remote module itself.</a:t>
+            </a:r>
+          </a:p>
+          <a:p>
+            <a:endParaRPr lang="en-US" dirty="0"/>
+          </a:p>
+          <a:p>
+            <a:r>
+              <a:rPr lang="en-US" dirty="0"/>
+              <a:t>Four remotes hang off that shell. Not every module should load the same way if you want something like this. The strategy will depend on which content you will prioritize.</a:t>
             </a:r>
           </a:p>
           <a:p>
@@ -1437,7 +1420,7 @@
     </p:spTree>
     <p:extLst>
       <p:ext uri="{BB962C8B-B14F-4D97-AF65-F5344CB8AC3E}">
-        <p14:creationId xmlns:p14="http://schemas.microsoft.com/office/powerpoint/2010/main" val="4040777647"/>
+        <p14:creationId xmlns:p14="http://schemas.microsoft.com/office/powerpoint/2010/main" val="1899568420"/>
       </p:ext>
     </p:extLst>
   </p:cSld>
@@ -1596,17 +1579,14 @@
           <a:bodyPr/>
           <a:lstStyle/>
           <a:p>
-            <a:r>
-              <a:rPr lang="en-GB" dirty="0"/>
-              <a:t>So, this is the flow if I click the Prescriptions menu which will navigate to the Prescriptions app.</a:t>
-            </a:r>
+            <a:endParaRPr lang="en-GB"/>
           </a:p>
         </p:txBody>
       </p:sp>
     </p:spTree>
     <p:extLst>
       <p:ext uri="{BB962C8B-B14F-4D97-AF65-F5344CB8AC3E}">
-        <p14:creationId xmlns:p14="http://schemas.microsoft.com/office/powerpoint/2010/main" val="874813599"/>
+        <p14:creationId xmlns:p14="http://schemas.microsoft.com/office/powerpoint/2010/main" val="362803367"/>
       </p:ext>
     </p:extLst>
   </p:cSld>
@@ -1682,153 +1662,18 @@
           <a:bodyPr/>
           <a:lstStyle/>
           <a:p>
-            <a:pPr marL="0" marR="0" lvl="0" indent="0" algn="l" defTabSz="914400" rtl="0" eaLnBrk="1" fontAlgn="auto" latinLnBrk="0" hangingPunct="1">
-              <a:lnSpc>
-                <a:spcPct val="100000"/>
-              </a:lnSpc>
-              <a:spcBef>
-                <a:spcPts val="0"/>
-              </a:spcBef>
-              <a:spcAft>
-                <a:spcPts val="0"/>
-              </a:spcAft>
-              <a:buClrTx/>
-              <a:buSzTx/>
-              <a:buFontTx/>
-              <a:buNone/>
-              <a:tabLst/>
-              <a:defRPr/>
-            </a:pPr>
             <a:r>
               <a:rPr lang="en-US" dirty="0"/>
-              <a:t>People ask why we wrap eager modules in </a:t>
-            </a:r>
-            <a:r>
-              <a:rPr lang="en-US" sz="1200" kern="1200" dirty="0">
-                <a:solidFill>
-                  <a:schemeClr val="tx1"/>
-                </a:solidFill>
-                <a:latin typeface="+mn-lt"/>
-                <a:ea typeface="+mn-ea"/>
-                <a:cs typeface="+mn-cs"/>
-              </a:rPr>
-              <a:t>lazy()</a:t>
-            </a:r>
+              <a:t>Prescriptions and Analytics are streamed. They load on demand, behind per-module skeletons.</a:t>
+            </a:r>
+          </a:p>
+          <a:p>
+            <a:endParaRPr lang="en-US" dirty="0"/>
+          </a:p>
+          <a:p>
             <a:r>
               <a:rPr lang="en-US" dirty="0"/>
-              <a:t>. It's because </a:t>
-            </a:r>
-            <a:r>
-              <a:rPr lang="en-US" sz="1200" kern="1200" dirty="0">
-                <a:solidFill>
-                  <a:schemeClr val="tx1"/>
-                </a:solidFill>
-                <a:latin typeface="+mn-lt"/>
-                <a:ea typeface="+mn-ea"/>
-                <a:cs typeface="+mn-cs"/>
-              </a:rPr>
-              <a:t>the</a:t>
-            </a:r>
-            <a:r>
-              <a:rPr lang="en-US" dirty="0"/>
-              <a:t> dynamic import in </a:t>
-            </a:r>
-            <a:r>
-              <a:rPr lang="en-US" dirty="0" err="1"/>
-              <a:t>index.tsx</a:t>
-            </a:r>
-            <a:r>
-              <a:rPr lang="en-US" dirty="0"/>
-              <a:t> already resolved the shared scope and that a static import makes the remote block first paint, and leaves nowhere to catch a failed remote. </a:t>
-            </a:r>
-          </a:p>
-          <a:p>
-            <a:pPr marL="0" marR="0" lvl="0" indent="0" algn="l" defTabSz="914400" rtl="0" eaLnBrk="1" fontAlgn="auto" latinLnBrk="0" hangingPunct="1">
-              <a:lnSpc>
-                <a:spcPct val="100000"/>
-              </a:lnSpc>
-              <a:spcBef>
-                <a:spcPts val="0"/>
-              </a:spcBef>
-              <a:spcAft>
-                <a:spcPts val="0"/>
-              </a:spcAft>
-              <a:buClrTx/>
-              <a:buSzTx/>
-              <a:buFontTx/>
-              <a:buNone/>
-              <a:tabLst/>
-              <a:defRPr/>
-            </a:pPr>
-            <a:endParaRPr lang="en-US" dirty="0"/>
-          </a:p>
-          <a:p>
-            <a:pPr marL="0" marR="0" lvl="0" indent="0" algn="l" defTabSz="914400" rtl="0" eaLnBrk="1" fontAlgn="auto" latinLnBrk="0" hangingPunct="1">
-              <a:lnSpc>
-                <a:spcPct val="100000"/>
-              </a:lnSpc>
-              <a:spcBef>
-                <a:spcPts val="0"/>
-              </a:spcBef>
-              <a:spcAft>
-                <a:spcPts val="0"/>
-              </a:spcAft>
-              <a:buClrTx/>
-              <a:buSzTx/>
-              <a:buFontTx/>
-              <a:buNone/>
-              <a:tabLst/>
-              <a:defRPr/>
-            </a:pPr>
-            <a:r>
-              <a:rPr lang="en-US" dirty="0"/>
-              <a:t>So, we fire </a:t>
-            </a:r>
-            <a:r>
-              <a:rPr lang="en-US" sz="1200" kern="1200" dirty="0">
-                <a:solidFill>
-                  <a:schemeClr val="tx1"/>
-                </a:solidFill>
-                <a:latin typeface="+mn-lt"/>
-                <a:ea typeface="+mn-ea"/>
-                <a:cs typeface="+mn-cs"/>
-              </a:rPr>
-              <a:t>import()</a:t>
-            </a:r>
-            <a:r>
-              <a:rPr lang="en-US" dirty="0"/>
-              <a:t> at shell </a:t>
-            </a:r>
-            <a:r>
-              <a:rPr lang="en-US" dirty="0" err="1"/>
-              <a:t>init</a:t>
-            </a:r>
-            <a:r>
-              <a:rPr lang="en-US" dirty="0"/>
-              <a:t> to warm it, and </a:t>
-            </a:r>
-            <a:r>
-              <a:rPr lang="en-US" sz="1200" kern="1200" dirty="0">
-                <a:solidFill>
-                  <a:schemeClr val="tx1"/>
-                </a:solidFill>
-                <a:latin typeface="+mn-lt"/>
-                <a:ea typeface="+mn-ea"/>
-                <a:cs typeface="+mn-cs"/>
-              </a:rPr>
-              <a:t>lazy()</a:t>
-            </a:r>
-            <a:r>
-              <a:rPr lang="en-US" dirty="0"/>
-              <a:t> resolves from the module registry instantly — while keeping the Suspense and </a:t>
-            </a:r>
-            <a:r>
-              <a:rPr lang="en-US" dirty="0" err="1"/>
-              <a:t>ErrorBoundary</a:t>
-            </a:r>
-            <a:r>
-              <a:rPr lang="en-US" dirty="0"/>
-              <a:t> per module.</a:t>
+              <a:t>Every strategy still gets three layers of resilience. A catch on lazy, so an unreachable remote becomes a fallback instead of a white screen. Suspense, so a loading remote shows its own skeleton. An error boundary, so a runtime crash in one remote does not take down the app.</a:t>
             </a:r>
           </a:p>
           <a:p>
@@ -1839,7 +1684,7 @@
     </p:spTree>
     <p:extLst>
       <p:ext uri="{BB962C8B-B14F-4D97-AF65-F5344CB8AC3E}">
-        <p14:creationId xmlns:p14="http://schemas.microsoft.com/office/powerpoint/2010/main" val="2316851497"/>
+        <p14:creationId xmlns:p14="http://schemas.microsoft.com/office/powerpoint/2010/main" val="4040777647"/>
       </p:ext>
     </p:extLst>
   </p:cSld>
@@ -1916,77 +1761,16 @@
           <a:lstStyle/>
           <a:p>
             <a:r>
-              <a:rPr lang="en-US" dirty="0"/>
-              <a:t>Before I do another demo, here are the functionalities of the other buttons on the menu header.</a:t>
-            </a:r>
-          </a:p>
-          <a:p>
-            <a:endParaRPr lang="en-US" dirty="0"/>
-          </a:p>
-          <a:p>
-            <a:r>
-              <a:rPr lang="en-US" dirty="0"/>
-              <a:t>A health monitor that polls remoteEntry.js every five seconds. </a:t>
-            </a:r>
-          </a:p>
-          <a:p>
-            <a:r>
-              <a:rPr lang="en-US" dirty="0"/>
-              <a:t>Kill switches. </a:t>
-            </a:r>
-          </a:p>
-          <a:p>
-            <a:r>
-              <a:rPr lang="en-US" dirty="0"/>
-              <a:t>That panel is for the demo. I can take a module down in front of you and show you that the rest of the app keeps running. Basically, we are going to simulate </a:t>
-            </a:r>
-            <a:r>
-              <a:rPr lang="en-US" sz="1200" i="1" dirty="0">
-                <a:solidFill>
-                  <a:schemeClr val="bg1">
-                    <a:lumMod val="95000"/>
-                  </a:schemeClr>
-                </a:solidFill>
-                <a:latin typeface="Instrument Serif" pitchFamily="34" charset="0"/>
-                <a:ea typeface="Instrument Serif" pitchFamily="34" charset="-122"/>
-              </a:rPr>
-              <a:t>m</a:t>
-            </a:r>
-            <a:r>
-              <a:rPr lang="en-US" sz="1200" i="1" dirty="0">
-                <a:solidFill>
-                  <a:schemeClr val="bg1">
-                    <a:lumMod val="95000"/>
-                  </a:schemeClr>
-                </a:solidFill>
-                <a:latin typeface="Instrument Serif" pitchFamily="34" charset="0"/>
-                <a:ea typeface="Instrument Serif" pitchFamily="34" charset="-122"/>
-                <a:cs typeface="Instrument Serif" pitchFamily="34" charset="-120"/>
-              </a:rPr>
-              <a:t>odule-level crashes, network failures, and bad deploys are isolated at the boundary. </a:t>
-            </a:r>
-          </a:p>
-          <a:p>
-            <a:r>
-              <a:rPr lang="en-US" sz="1200" i="0" dirty="0">
-                <a:solidFill>
-                  <a:schemeClr val="bg1">
-                    <a:lumMod val="95000"/>
-                  </a:schemeClr>
-                </a:solidFill>
-                <a:latin typeface="Instrument Serif" pitchFamily="34" charset="0"/>
-                <a:ea typeface="Instrument Serif" pitchFamily="34" charset="-122"/>
-              </a:rPr>
-              <a:t>Theming.</a:t>
-            </a:r>
-            <a:endParaRPr lang="en-US" i="0" dirty="0"/>
+              <a:rPr lang="en-GB" dirty="0"/>
+              <a:t>So, this is the flow if I click the Prescriptions menu which will navigate to the Prescriptions app.</a:t>
+            </a:r>
           </a:p>
         </p:txBody>
       </p:sp>
     </p:spTree>
     <p:extLst>
       <p:ext uri="{BB962C8B-B14F-4D97-AF65-F5344CB8AC3E}">
-        <p14:creationId xmlns:p14="http://schemas.microsoft.com/office/powerpoint/2010/main" val="3599504877"/>
+        <p14:creationId xmlns:p14="http://schemas.microsoft.com/office/powerpoint/2010/main" val="874813599"/>
       </p:ext>
     </p:extLst>
   </p:cSld>
@@ -2062,14 +1846,123 @@
           <a:bodyPr/>
           <a:lstStyle/>
           <a:p>
-            <a:endParaRPr lang="en-US" dirty="0"/>
+            <a:r>
+              <a:rPr lang="en-US" sz="1200" b="0" i="0" kern="1200" dirty="0">
+                <a:solidFill>
+                  <a:schemeClr val="tx1"/>
+                </a:solidFill>
+                <a:effectLst/>
+                <a:latin typeface="+mn-lt"/>
+                <a:ea typeface="+mn-ea"/>
+                <a:cs typeface="+mn-cs"/>
+              </a:rPr>
+              <a:t>People ask why eager modules are still wrapped in lazy(). Two reasons. A static import would make the shell wait for the remote before first paint, and if that remote were down there'd be no </a:t>
+            </a:r>
+            <a:r>
+              <a:rPr lang="en-US" sz="1200" b="0" i="0" kern="1200" dirty="0" err="1">
+                <a:solidFill>
+                  <a:schemeClr val="tx1"/>
+                </a:solidFill>
+                <a:effectLst/>
+                <a:latin typeface="+mn-lt"/>
+                <a:ea typeface="+mn-ea"/>
+                <a:cs typeface="+mn-cs"/>
+              </a:rPr>
+              <a:t>ErrorBoundary</a:t>
+            </a:r>
+            <a:r>
+              <a:rPr lang="en-US" sz="1200" b="0" i="0" kern="1200" dirty="0">
+                <a:solidFill>
+                  <a:schemeClr val="tx1"/>
+                </a:solidFill>
+                <a:effectLst/>
+                <a:latin typeface="+mn-lt"/>
+                <a:ea typeface="+mn-ea"/>
+                <a:cs typeface="+mn-cs"/>
+              </a:rPr>
+              <a:t> yet to catch it — just a white screen. </a:t>
+            </a:r>
+          </a:p>
+          <a:p>
+            <a:endParaRPr lang="en-US" sz="1200" b="0" i="0" kern="1200" dirty="0">
+              <a:solidFill>
+                <a:schemeClr val="tx1"/>
+              </a:solidFill>
+              <a:effectLst/>
+              <a:latin typeface="+mn-lt"/>
+              <a:ea typeface="+mn-ea"/>
+              <a:cs typeface="+mn-cs"/>
+            </a:endParaRPr>
+          </a:p>
+          <a:p>
+            <a:r>
+              <a:rPr lang="en-US" sz="1200" b="0" i="0" kern="1200" dirty="0">
+                <a:solidFill>
+                  <a:schemeClr val="tx1"/>
+                </a:solidFill>
+                <a:effectLst/>
+                <a:latin typeface="+mn-lt"/>
+                <a:ea typeface="+mn-ea"/>
+                <a:cs typeface="+mn-cs"/>
+              </a:rPr>
+              <a:t>So instead we fire import() at shell </a:t>
+            </a:r>
+            <a:r>
+              <a:rPr lang="en-US" sz="1200" b="0" i="0" kern="1200" dirty="0" err="1">
+                <a:solidFill>
+                  <a:schemeClr val="tx1"/>
+                </a:solidFill>
+                <a:effectLst/>
+                <a:latin typeface="+mn-lt"/>
+                <a:ea typeface="+mn-ea"/>
+                <a:cs typeface="+mn-cs"/>
+              </a:rPr>
+              <a:t>init</a:t>
+            </a:r>
+            <a:r>
+              <a:rPr lang="en-US" sz="1200" b="0" i="0" kern="1200" dirty="0">
+                <a:solidFill>
+                  <a:schemeClr val="tx1"/>
+                </a:solidFill>
+                <a:effectLst/>
+                <a:latin typeface="+mn-lt"/>
+                <a:ea typeface="+mn-ea"/>
+                <a:cs typeface="+mn-cs"/>
+              </a:rPr>
+              <a:t> to warm the module registry, and lazy() resolves from it with no network round-trip, while every module keeps its own Suspense and </a:t>
+            </a:r>
+            <a:r>
+              <a:rPr lang="en-US" sz="1200" b="0" i="0" kern="1200" dirty="0" err="1">
+                <a:solidFill>
+                  <a:schemeClr val="tx1"/>
+                </a:solidFill>
+                <a:effectLst/>
+                <a:latin typeface="+mn-lt"/>
+                <a:ea typeface="+mn-ea"/>
+                <a:cs typeface="+mn-cs"/>
+              </a:rPr>
+              <a:t>ErrorBoundary</a:t>
+            </a:r>
+            <a:r>
+              <a:rPr lang="en-US" sz="1200" b="0" i="0" kern="1200" dirty="0">
+                <a:solidFill>
+                  <a:schemeClr val="tx1"/>
+                </a:solidFill>
+                <a:effectLst/>
+                <a:latin typeface="+mn-lt"/>
+                <a:ea typeface="+mn-ea"/>
+                <a:cs typeface="+mn-cs"/>
+              </a:rPr>
+              <a:t>.</a:t>
+            </a:r>
+            <a:endParaRPr lang="en-GB" dirty="0"/>
           </a:p>
         </p:txBody>
       </p:sp>
     </p:spTree>
     <p:extLst>
       <p:ext uri="{BB962C8B-B14F-4D97-AF65-F5344CB8AC3E}">
-        <p14:creationId xmlns:p14="http://schemas.microsoft.com/office/powerpoint/2010/main" val="3835048777"/>
+        <p14:creationId xmlns:p14="http://schemas.microsoft.com/office/powerpoint/2010/main" val="2316851497"/>
       </p:ext>
     </p:extLst>
   </p:cSld>
@@ -2146,24 +2039,77 @@
           <a:lstStyle/>
           <a:p>
             <a:r>
-              <a:rPr lang="en-GB" dirty="0"/>
-              <a:t>This is how you deal with client state management. I will show you more later and also something about server state management like </a:t>
-            </a:r>
-            <a:r>
-              <a:rPr lang="en-GB" dirty="0" err="1"/>
-              <a:t>TanStack</a:t>
-            </a:r>
-            <a:r>
-              <a:rPr lang="en-GB" dirty="0"/>
-              <a:t> Query.</a:t>
-            </a:r>
+              <a:rPr lang="en-US" dirty="0"/>
+              <a:t>Before I do another demo, here are the functionalities of the other buttons on the menu header.</a:t>
+            </a:r>
+          </a:p>
+          <a:p>
+            <a:endParaRPr lang="en-US" dirty="0"/>
+          </a:p>
+          <a:p>
+            <a:r>
+              <a:rPr lang="en-US" dirty="0"/>
+              <a:t>A health monitor that polls remoteEntry.js every five seconds. </a:t>
+            </a:r>
+          </a:p>
+          <a:p>
+            <a:r>
+              <a:rPr lang="en-US" dirty="0"/>
+              <a:t>Kill switches. </a:t>
+            </a:r>
+          </a:p>
+          <a:p>
+            <a:r>
+              <a:rPr lang="en-US" dirty="0"/>
+              <a:t>That panel is for the demo. I can take a module down in front of you and show you that the rest of the app keeps running. Basically, we are going to simulate </a:t>
+            </a:r>
+            <a:r>
+              <a:rPr lang="en-US" sz="1200" i="1" dirty="0">
+                <a:solidFill>
+                  <a:schemeClr val="bg1">
+                    <a:lumMod val="95000"/>
+                  </a:schemeClr>
+                </a:solidFill>
+                <a:latin typeface="Instrument Serif" pitchFamily="34" charset="0"/>
+                <a:ea typeface="Instrument Serif" pitchFamily="34" charset="-122"/>
+              </a:rPr>
+              <a:t>m</a:t>
+            </a:r>
+            <a:r>
+              <a:rPr lang="en-US" sz="1200" i="1" dirty="0">
+                <a:solidFill>
+                  <a:schemeClr val="bg1">
+                    <a:lumMod val="95000"/>
+                  </a:schemeClr>
+                </a:solidFill>
+                <a:latin typeface="Instrument Serif" pitchFamily="34" charset="0"/>
+                <a:ea typeface="Instrument Serif" pitchFamily="34" charset="-122"/>
+                <a:cs typeface="Instrument Serif" pitchFamily="34" charset="-120"/>
+              </a:rPr>
+              <a:t>odule-level crashes, network failures, and bad deploys are isolated at the boundary. </a:t>
+            </a:r>
+          </a:p>
+          <a:p>
+            <a:r>
+              <a:rPr lang="en-US" sz="1200" i="0" dirty="0">
+                <a:solidFill>
+                  <a:schemeClr val="bg1">
+                    <a:lumMod val="95000"/>
+                  </a:schemeClr>
+                </a:solidFill>
+                <a:latin typeface="Instrument Serif" pitchFamily="34" charset="0"/>
+                <a:ea typeface="Instrument Serif" pitchFamily="34" charset="-122"/>
+              </a:rPr>
+              <a:t>Theming.</a:t>
+            </a:r>
+            <a:endParaRPr lang="en-US" i="0" dirty="0"/>
           </a:p>
         </p:txBody>
       </p:sp>
     </p:spTree>
     <p:extLst>
       <p:ext uri="{BB962C8B-B14F-4D97-AF65-F5344CB8AC3E}">
-        <p14:creationId xmlns:p14="http://schemas.microsoft.com/office/powerpoint/2010/main" val="3759391641"/>
+        <p14:creationId xmlns:p14="http://schemas.microsoft.com/office/powerpoint/2010/main" val="3599504877"/>
       </p:ext>
     </p:extLst>
   </p:cSld>
@@ -2239,71 +2185,14 @@
           <a:bodyPr/>
           <a:lstStyle/>
           <a:p>
-            <a:r>
-              <a:rPr lang="en-US" dirty="0"/>
-              <a:t>Why use the browser </a:t>
-            </a:r>
-            <a:r>
-              <a:rPr lang="en-US" dirty="0" err="1"/>
-              <a:t>api</a:t>
-            </a:r>
-            <a:r>
-              <a:rPr lang="en-US" dirty="0"/>
-              <a:t> events instead of a shared store? A shared store is a shared dependency. </a:t>
-            </a:r>
-          </a:p>
-          <a:p>
             <a:endParaRPr lang="en-US" dirty="0"/>
-          </a:p>
-          <a:p>
-            <a:r>
-              <a:rPr lang="en-US" dirty="0"/>
-              <a:t>There will be version coupling between teams if shared stores, while the events will survive in independent deploys. </a:t>
-            </a:r>
-          </a:p>
-          <a:p>
-            <a:endParaRPr lang="en-US" dirty="0"/>
-          </a:p>
-          <a:p>
-            <a:r>
-              <a:rPr lang="en-US" dirty="0"/>
-              <a:t>They even survive framework diversity. For example, a Vue remote and a React remote can talk through the same window contract.</a:t>
-            </a:r>
-          </a:p>
-          <a:p>
-            <a:endParaRPr lang="en-US" dirty="0"/>
-          </a:p>
-          <a:p>
-            <a:r>
-              <a:rPr lang="en-US" dirty="0"/>
-              <a:t>The payload is still a versioned contract. Keep it backward compatible. Each remote defines the same event shapes in its own types file by augmenting </a:t>
-            </a:r>
-            <a:r>
-              <a:rPr lang="en-US" dirty="0" err="1"/>
-              <a:t>WindowEventMap</a:t>
-            </a:r>
-            <a:r>
-              <a:rPr lang="en-US" dirty="0"/>
-              <a:t>. No shared package is required. </a:t>
-            </a:r>
-            <a:r>
-              <a:rPr lang="en-US" dirty="0" err="1"/>
-              <a:t>addEventListener</a:t>
-            </a:r>
-            <a:r>
-              <a:rPr lang="en-US" dirty="0"/>
-              <a:t> is fully typed.</a:t>
-            </a:r>
-          </a:p>
-          <a:p>
-            <a:endParaRPr lang="en-GB" dirty="0"/>
           </a:p>
         </p:txBody>
       </p:sp>
     </p:spTree>
     <p:extLst>
       <p:ext uri="{BB962C8B-B14F-4D97-AF65-F5344CB8AC3E}">
-        <p14:creationId xmlns:p14="http://schemas.microsoft.com/office/powerpoint/2010/main" val="3974856141"/>
+        <p14:creationId xmlns:p14="http://schemas.microsoft.com/office/powerpoint/2010/main" val="3835048777"/>
       </p:ext>
     </p:extLst>
   </p:cSld>
@@ -2380,70 +2269,24 @@
           <a:lstStyle/>
           <a:p>
             <a:r>
-              <a:rPr lang="en-US" dirty="0"/>
-              <a:t>Each app owns its own store and its own query client — nothing is shared. For client state they agree on a typed event contract, and whoever owns the state is the one who broadcasts: </a:t>
-            </a:r>
-          </a:p>
-          <a:p>
-            <a:endParaRPr lang="en-US" dirty="0"/>
-          </a:p>
-          <a:p>
-            <a:r>
-              <a:rPr lang="en-US" dirty="0"/>
-              <a:t>the shell owns theme and routing, so it broadcasts those; </a:t>
-            </a:r>
-          </a:p>
-          <a:p>
-            <a:endParaRPr lang="en-US" dirty="0"/>
-          </a:p>
-          <a:p>
-            <a:r>
-              <a:rPr lang="en-US" dirty="0" err="1"/>
-              <a:t>addPrescription</a:t>
-            </a:r>
-            <a:r>
-              <a:rPr lang="en-US" dirty="0"/>
-              <a:t>.</a:t>
-            </a:r>
-          </a:p>
-          <a:p>
-            <a:endParaRPr lang="en-US" dirty="0"/>
-          </a:p>
-          <a:p>
-            <a:r>
-              <a:rPr lang="en-US" dirty="0" err="1"/>
-              <a:t>showNotification</a:t>
-            </a:r>
-            <a:r>
-              <a:rPr lang="en-US" dirty="0"/>
-              <a:t>.</a:t>
-            </a:r>
-          </a:p>
-          <a:p>
-            <a:endParaRPr lang="en-US" dirty="0"/>
-          </a:p>
-          <a:p>
-            <a:r>
-              <a:rPr lang="en-US" dirty="0"/>
-              <a:t>the counter belongs to nobody, so any module can. </a:t>
-            </a:r>
-          </a:p>
-          <a:p>
-            <a:endParaRPr lang="en-US" dirty="0"/>
-          </a:p>
-          <a:p>
-            <a:r>
-              <a:rPr lang="en-US" dirty="0"/>
-              <a:t>For server state, like TanStack Query, there's no syncing at all — every app just fetches, because the REST API is already the shared state.</a:t>
-            </a:r>
-            <a:endParaRPr lang="en-GB" dirty="0"/>
+              <a:rPr lang="en-GB" dirty="0"/>
+              <a:t>This is how you deal with client state management. I will show you more later and also something about server state management like </a:t>
+            </a:r>
+            <a:r>
+              <a:rPr lang="en-GB" dirty="0" err="1"/>
+              <a:t>TanStack</a:t>
+            </a:r>
+            <a:r>
+              <a:rPr lang="en-GB" dirty="0"/>
+              <a:t> Query.</a:t>
+            </a:r>
           </a:p>
         </p:txBody>
       </p:sp>
     </p:spTree>
     <p:extLst>
       <p:ext uri="{BB962C8B-B14F-4D97-AF65-F5344CB8AC3E}">
-        <p14:creationId xmlns:p14="http://schemas.microsoft.com/office/powerpoint/2010/main" val="983126966"/>
+        <p14:creationId xmlns:p14="http://schemas.microsoft.com/office/powerpoint/2010/main" val="3759391641"/>
       </p:ext>
     </p:extLst>
   </p:cSld>
@@ -2521,13 +2364,58 @@
           <a:p>
             <a:r>
               <a:rPr lang="en-US" dirty="0"/>
-              <a:t>Theming is a cross-cutting concern, and the shell owns it.</a:t>
-            </a:r>
-          </a:p>
-          <a:p>
+              <a:t>Why use the browser </a:t>
+            </a:r>
+            <a:r>
+              <a:rPr lang="en-US" dirty="0" err="1"/>
+              <a:t>api</a:t>
+            </a:r>
             <a:r>
               <a:rPr lang="en-US" dirty="0"/>
-              <a:t>The shell persists the choice to local storage. It applies CSS variables to the document element. It exposes a small bridge on window so a remote can read or set the theme without importing host code. And it broadcasts a theme-change event.</a:t>
+              <a:t> events instead of a shared store? A shared store is a shared dependency. </a:t>
+            </a:r>
+          </a:p>
+          <a:p>
+            <a:endParaRPr lang="en-US" dirty="0"/>
+          </a:p>
+          <a:p>
+            <a:r>
+              <a:rPr lang="en-US" dirty="0"/>
+              <a:t>There will be version coupling between teams if shared stores, while the events will survive in independent deploys. </a:t>
+            </a:r>
+          </a:p>
+          <a:p>
+            <a:endParaRPr lang="en-US" dirty="0"/>
+          </a:p>
+          <a:p>
+            <a:r>
+              <a:rPr lang="en-US" dirty="0"/>
+              <a:t>They even survive framework diversity. For example, a Vue remote and a React remote can talk through the same window contract.</a:t>
+            </a:r>
+          </a:p>
+          <a:p>
+            <a:endParaRPr lang="en-US" dirty="0"/>
+          </a:p>
+          <a:p>
+            <a:r>
+              <a:rPr lang="en-US" dirty="0"/>
+              <a:t>The payload is still a versioned contract. Keep it backward compatible. Each remote defines the same event shapes in its own types file by augmenting </a:t>
+            </a:r>
+            <a:r>
+              <a:rPr lang="en-US" dirty="0" err="1"/>
+              <a:t>WindowEventMap</a:t>
+            </a:r>
+            <a:r>
+              <a:rPr lang="en-US" dirty="0"/>
+              <a:t>. No shared package is required. </a:t>
+            </a:r>
+            <a:r>
+              <a:rPr lang="en-US" dirty="0" err="1"/>
+              <a:t>addEventListener</a:t>
+            </a:r>
+            <a:r>
+              <a:rPr lang="en-US" dirty="0"/>
+              <a:t> is fully typed.</a:t>
             </a:r>
           </a:p>
           <a:p>
@@ -2538,7 +2426,7 @@
     </p:spTree>
     <p:extLst>
       <p:ext uri="{BB962C8B-B14F-4D97-AF65-F5344CB8AC3E}">
-        <p14:creationId xmlns:p14="http://schemas.microsoft.com/office/powerpoint/2010/main" val="2728972476"/>
+        <p14:creationId xmlns:p14="http://schemas.microsoft.com/office/powerpoint/2010/main" val="3974856141"/>
       </p:ext>
     </p:extLst>
   </p:cSld>
@@ -2615,24 +2503,70 @@
           <a:lstStyle/>
           <a:p>
             <a:r>
-              <a:rPr lang="en-GB" dirty="0"/>
-              <a:t>And before I end this presentation, I have two things here I want to share. This is important because of our work has changed from writing code to </a:t>
-            </a:r>
-            <a:r>
-              <a:rPr lang="en-GB" dirty="0" err="1"/>
-              <a:t>vibecoding</a:t>
-            </a:r>
-            <a:r>
-              <a:rPr lang="en-GB" dirty="0"/>
-              <a:t> using AI agents making us 20x engineers now.</a:t>
-            </a:r>
+              <a:rPr lang="en-US" dirty="0"/>
+              <a:t>Each app owns its own store and its own query client — nothing is shared. For client state they agree on a typed event contract, and whoever owns the state is the one who broadcasts: </a:t>
+            </a:r>
+          </a:p>
+          <a:p>
+            <a:endParaRPr lang="en-US" dirty="0"/>
+          </a:p>
+          <a:p>
+            <a:r>
+              <a:rPr lang="en-US" dirty="0"/>
+              <a:t>the shell owns theme and routing, so it broadcasts those; </a:t>
+            </a:r>
+          </a:p>
+          <a:p>
+            <a:endParaRPr lang="en-US" dirty="0"/>
+          </a:p>
+          <a:p>
+            <a:r>
+              <a:rPr lang="en-US" dirty="0" err="1"/>
+              <a:t>addPrescription</a:t>
+            </a:r>
+            <a:r>
+              <a:rPr lang="en-US" dirty="0"/>
+              <a:t>.</a:t>
+            </a:r>
+          </a:p>
+          <a:p>
+            <a:endParaRPr lang="en-US" dirty="0"/>
+          </a:p>
+          <a:p>
+            <a:r>
+              <a:rPr lang="en-US" dirty="0" err="1"/>
+              <a:t>showNotification</a:t>
+            </a:r>
+            <a:r>
+              <a:rPr lang="en-US" dirty="0"/>
+              <a:t>.</a:t>
+            </a:r>
+          </a:p>
+          <a:p>
+            <a:endParaRPr lang="en-US" dirty="0"/>
+          </a:p>
+          <a:p>
+            <a:r>
+              <a:rPr lang="en-US" dirty="0"/>
+              <a:t>the counter belongs to nobody, so any module can. </a:t>
+            </a:r>
+          </a:p>
+          <a:p>
+            <a:endParaRPr lang="en-US" dirty="0"/>
+          </a:p>
+          <a:p>
+            <a:r>
+              <a:rPr lang="en-US" dirty="0"/>
+              <a:t>For server state, like TanStack Query, there's no syncing at all — every app just fetches, because the REST API is already the shared state.</a:t>
+            </a:r>
+            <a:endParaRPr lang="en-GB" dirty="0"/>
           </a:p>
         </p:txBody>
       </p:sp>
     </p:spTree>
     <p:extLst>
       <p:ext uri="{BB962C8B-B14F-4D97-AF65-F5344CB8AC3E}">
-        <p14:creationId xmlns:p14="http://schemas.microsoft.com/office/powerpoint/2010/main" val="2069423728"/>
+        <p14:creationId xmlns:p14="http://schemas.microsoft.com/office/powerpoint/2010/main" val="983126966"/>
       </p:ext>
     </p:extLst>
   </p:cSld>
@@ -2708,33 +2642,14 @@
           <a:bodyPr/>
           <a:lstStyle/>
           <a:p>
-            <a:r>
-              <a:rPr lang="en-GB" dirty="0"/>
-              <a:t>First is, you can nest AGENTS.md files to your different micro frontend apps that’s good for your AI agents. And </a:t>
-            </a:r>
-            <a:r>
-              <a:rPr lang="en-GB" dirty="0" err="1"/>
-              <a:t>Rspack</a:t>
-            </a:r>
-            <a:r>
-              <a:rPr lang="en-GB" dirty="0"/>
-              <a:t> published agent skills that you can use just in case today’s frontier models still don’t have any idea what the </a:t>
-            </a:r>
-            <a:r>
-              <a:rPr lang="en-GB" dirty="0" err="1"/>
-              <a:t>Rspack</a:t>
-            </a:r>
-            <a:r>
-              <a:rPr lang="en-GB" dirty="0"/>
-              <a:t> v2.0 can do.</a:t>
-            </a:r>
+            <a:endParaRPr lang="en-GB"/>
           </a:p>
         </p:txBody>
       </p:sp>
     </p:spTree>
     <p:extLst>
       <p:ext uri="{BB962C8B-B14F-4D97-AF65-F5344CB8AC3E}">
-        <p14:creationId xmlns:p14="http://schemas.microsoft.com/office/powerpoint/2010/main" val="4203036748"/>
+        <p14:creationId xmlns:p14="http://schemas.microsoft.com/office/powerpoint/2010/main" val="460229451"/>
       </p:ext>
     </p:extLst>
   </p:cSld>
@@ -2832,6 +2747,297 @@
   <p:cSld>
     <p:spTree>
       <p:nvGrpSpPr>
+        <p:cNvPr id="1" name=""/>
+        <p:cNvGrpSpPr/>
+        <p:nvPr/>
+      </p:nvGrpSpPr>
+      <p:grpSpPr>
+        <a:xfrm>
+          <a:off x="0" y="0"/>
+          <a:ext cx="0" cy="0"/>
+          <a:chOff x="0" y="0"/>
+          <a:chExt cx="0" cy="0"/>
+        </a:xfrm>
+      </p:grpSpPr>
+      <p:sp>
+        <p:nvSpPr>
+          <p:cNvPr id="2" name="Slide Image Placeholder 1"/>
+          <p:cNvSpPr>
+            <a:spLocks noGrp="1" noRot="1" noChangeAspect="1"/>
+          </p:cNvSpPr>
+          <p:nvPr>
+            <p:ph type="sldImg"/>
+          </p:nvPr>
+        </p:nvSpPr>
+        <p:spPr>
+          <a:xfrm>
+            <a:off x="-225425" y="1524000"/>
+            <a:ext cx="7308850" cy="4113213"/>
+          </a:xfrm>
+          <a:prstGeom prst="rect">
+            <a:avLst/>
+          </a:prstGeom>
+          <a:noFill/>
+          <a:ln w="12700">
+            <a:solidFill>
+              <a:prstClr val="black"/>
+            </a:solidFill>
+          </a:ln>
+        </p:spPr>
+      </p:sp>
+      <p:sp>
+        <p:nvSpPr>
+          <p:cNvPr id="3" name="Notes Placeholder 2"/>
+          <p:cNvSpPr>
+            <a:spLocks noGrp="1"/>
+          </p:cNvSpPr>
+          <p:nvPr>
+            <p:ph type="body" idx="1"/>
+          </p:nvPr>
+        </p:nvSpPr>
+        <p:spPr>
+          <a:xfrm>
+            <a:off x="685800" y="5865813"/>
+            <a:ext cx="5486400" cy="4799012"/>
+          </a:xfrm>
+          <a:prstGeom prst="rect">
+            <a:avLst/>
+          </a:prstGeom>
+        </p:spPr>
+        <p:txBody>
+          <a:bodyPr/>
+          <a:lstStyle/>
+          <a:p>
+            <a:r>
+              <a:rPr lang="en-US" dirty="0"/>
+              <a:t>Theming is a cross-cutting concern, and the shell owns it.</a:t>
+            </a:r>
+          </a:p>
+          <a:p>
+            <a:r>
+              <a:rPr lang="en-US" dirty="0"/>
+              <a:t>The shell persists the choice to local storage. It applies CSS variables to the document element. It exposes a small bridge on window so a remote can read or set the theme without importing host code. And it broadcasts a theme-change event.</a:t>
+            </a:r>
+          </a:p>
+          <a:p>
+            <a:endParaRPr lang="en-GB" dirty="0"/>
+          </a:p>
+        </p:txBody>
+      </p:sp>
+    </p:spTree>
+    <p:extLst>
+      <p:ext uri="{BB962C8B-B14F-4D97-AF65-F5344CB8AC3E}">
+        <p14:creationId xmlns:p14="http://schemas.microsoft.com/office/powerpoint/2010/main" val="2728972476"/>
+      </p:ext>
+    </p:extLst>
+  </p:cSld>
+  <p:clrMapOvr>
+    <a:masterClrMapping/>
+  </p:clrMapOvr>
+</p:notes>
+</file>
+
+<file path=ppt/notesSlides/notesSlide31.xml><?xml version="1.0" encoding="utf-8"?>
+<p:notes xmlns:a="http://schemas.openxmlformats.org/drawingml/2006/main" xmlns:r="http://schemas.openxmlformats.org/officeDocument/2006/relationships" xmlns:p="http://schemas.openxmlformats.org/presentationml/2006/main">
+  <p:cSld>
+    <p:spTree>
+      <p:nvGrpSpPr>
+        <p:cNvPr id="1" name=""/>
+        <p:cNvGrpSpPr/>
+        <p:nvPr/>
+      </p:nvGrpSpPr>
+      <p:grpSpPr>
+        <a:xfrm>
+          <a:off x="0" y="0"/>
+          <a:ext cx="0" cy="0"/>
+          <a:chOff x="0" y="0"/>
+          <a:chExt cx="0" cy="0"/>
+        </a:xfrm>
+      </p:grpSpPr>
+      <p:sp>
+        <p:nvSpPr>
+          <p:cNvPr id="2" name="Slide Image Placeholder 1"/>
+          <p:cNvSpPr>
+            <a:spLocks noGrp="1" noRot="1" noChangeAspect="1"/>
+          </p:cNvSpPr>
+          <p:nvPr>
+            <p:ph type="sldImg"/>
+          </p:nvPr>
+        </p:nvSpPr>
+        <p:spPr>
+          <a:xfrm>
+            <a:off x="-225425" y="1524000"/>
+            <a:ext cx="7308850" cy="4113213"/>
+          </a:xfrm>
+          <a:prstGeom prst="rect">
+            <a:avLst/>
+          </a:prstGeom>
+          <a:noFill/>
+          <a:ln w="12700">
+            <a:solidFill>
+              <a:prstClr val="black"/>
+            </a:solidFill>
+          </a:ln>
+        </p:spPr>
+      </p:sp>
+      <p:sp>
+        <p:nvSpPr>
+          <p:cNvPr id="3" name="Notes Placeholder 2"/>
+          <p:cNvSpPr>
+            <a:spLocks noGrp="1"/>
+          </p:cNvSpPr>
+          <p:nvPr>
+            <p:ph type="body" idx="1"/>
+          </p:nvPr>
+        </p:nvSpPr>
+        <p:spPr>
+          <a:xfrm>
+            <a:off x="685800" y="5865813"/>
+            <a:ext cx="5486400" cy="4799012"/>
+          </a:xfrm>
+          <a:prstGeom prst="rect">
+            <a:avLst/>
+          </a:prstGeom>
+        </p:spPr>
+        <p:txBody>
+          <a:bodyPr/>
+          <a:lstStyle/>
+          <a:p>
+            <a:r>
+              <a:rPr lang="en-GB" dirty="0"/>
+              <a:t>And before I end this presentation, I have two things here I want to share. This is important because of our work has changed from writing code to </a:t>
+            </a:r>
+            <a:r>
+              <a:rPr lang="en-GB" dirty="0" err="1"/>
+              <a:t>vibecoding</a:t>
+            </a:r>
+            <a:r>
+              <a:rPr lang="en-GB" dirty="0"/>
+              <a:t> using AI agents making us 20x engineers now.</a:t>
+            </a:r>
+          </a:p>
+        </p:txBody>
+      </p:sp>
+    </p:spTree>
+    <p:extLst>
+      <p:ext uri="{BB962C8B-B14F-4D97-AF65-F5344CB8AC3E}">
+        <p14:creationId xmlns:p14="http://schemas.microsoft.com/office/powerpoint/2010/main" val="2069423728"/>
+      </p:ext>
+    </p:extLst>
+  </p:cSld>
+  <p:clrMapOvr>
+    <a:masterClrMapping/>
+  </p:clrMapOvr>
+</p:notes>
+</file>
+
+<file path=ppt/notesSlides/notesSlide32.xml><?xml version="1.0" encoding="utf-8"?>
+<p:notes xmlns:a="http://schemas.openxmlformats.org/drawingml/2006/main" xmlns:r="http://schemas.openxmlformats.org/officeDocument/2006/relationships" xmlns:p="http://schemas.openxmlformats.org/presentationml/2006/main">
+  <p:cSld>
+    <p:spTree>
+      <p:nvGrpSpPr>
+        <p:cNvPr id="1" name=""/>
+        <p:cNvGrpSpPr/>
+        <p:nvPr/>
+      </p:nvGrpSpPr>
+      <p:grpSpPr>
+        <a:xfrm>
+          <a:off x="0" y="0"/>
+          <a:ext cx="0" cy="0"/>
+          <a:chOff x="0" y="0"/>
+          <a:chExt cx="0" cy="0"/>
+        </a:xfrm>
+      </p:grpSpPr>
+      <p:sp>
+        <p:nvSpPr>
+          <p:cNvPr id="2" name="Slide Image Placeholder 1"/>
+          <p:cNvSpPr>
+            <a:spLocks noGrp="1" noRot="1" noChangeAspect="1"/>
+          </p:cNvSpPr>
+          <p:nvPr>
+            <p:ph type="sldImg"/>
+          </p:nvPr>
+        </p:nvSpPr>
+        <p:spPr>
+          <a:xfrm>
+            <a:off x="-225425" y="1524000"/>
+            <a:ext cx="7308850" cy="4113213"/>
+          </a:xfrm>
+          <a:prstGeom prst="rect">
+            <a:avLst/>
+          </a:prstGeom>
+          <a:noFill/>
+          <a:ln w="12700">
+            <a:solidFill>
+              <a:prstClr val="black"/>
+            </a:solidFill>
+          </a:ln>
+        </p:spPr>
+      </p:sp>
+      <p:sp>
+        <p:nvSpPr>
+          <p:cNvPr id="3" name="Notes Placeholder 2"/>
+          <p:cNvSpPr>
+            <a:spLocks noGrp="1"/>
+          </p:cNvSpPr>
+          <p:nvPr>
+            <p:ph type="body" idx="1"/>
+          </p:nvPr>
+        </p:nvSpPr>
+        <p:spPr>
+          <a:xfrm>
+            <a:off x="685800" y="5865813"/>
+            <a:ext cx="5486400" cy="4799012"/>
+          </a:xfrm>
+          <a:prstGeom prst="rect">
+            <a:avLst/>
+          </a:prstGeom>
+        </p:spPr>
+        <p:txBody>
+          <a:bodyPr/>
+          <a:lstStyle/>
+          <a:p>
+            <a:r>
+              <a:rPr lang="en-GB" dirty="0"/>
+              <a:t>First is, you can nest AGENTS.md files to your different micro frontend apps that’s good for your AI agents. And </a:t>
+            </a:r>
+            <a:r>
+              <a:rPr lang="en-GB" dirty="0" err="1"/>
+              <a:t>Rspack</a:t>
+            </a:r>
+            <a:r>
+              <a:rPr lang="en-GB" dirty="0"/>
+              <a:t> published agent skills that you can use just in case today’s frontier models still don’t have any idea what the </a:t>
+            </a:r>
+            <a:r>
+              <a:rPr lang="en-GB" dirty="0" err="1"/>
+              <a:t>Rspack</a:t>
+            </a:r>
+            <a:r>
+              <a:rPr lang="en-GB" dirty="0"/>
+              <a:t> v2.0 can do.</a:t>
+            </a:r>
+          </a:p>
+        </p:txBody>
+      </p:sp>
+    </p:spTree>
+    <p:extLst>
+      <p:ext uri="{BB962C8B-B14F-4D97-AF65-F5344CB8AC3E}">
+        <p14:creationId xmlns:p14="http://schemas.microsoft.com/office/powerpoint/2010/main" val="4203036748"/>
+      </p:ext>
+    </p:extLst>
+  </p:cSld>
+  <p:clrMapOvr>
+    <a:masterClrMapping/>
+  </p:clrMapOvr>
+</p:notes>
+</file>
+
+<file path=ppt/notesSlides/notesSlide33.xml><?xml version="1.0" encoding="utf-8"?>
+<p:notes xmlns:a="http://schemas.openxmlformats.org/drawingml/2006/main" xmlns:r="http://schemas.openxmlformats.org/officeDocument/2006/relationships" xmlns:p="http://schemas.openxmlformats.org/presentationml/2006/main">
+  <p:cSld>
+    <p:spTree>
+      <p:nvGrpSpPr>
         <p:cNvPr id="1" name="">
           <a:extLst>
             <a:ext uri="{FF2B5EF4-FFF2-40B4-BE49-F238E27FC236}">
@@ -2948,7 +3154,7 @@
 </p:notes>
 </file>
 
-<file path=ppt/notesSlides/notesSlide31.xml><?xml version="1.0" encoding="utf-8"?>
+<file path=ppt/notesSlides/notesSlide34.xml><?xml version="1.0" encoding="utf-8"?>
 <p:notes xmlns:a="http://schemas.openxmlformats.org/drawingml/2006/main" xmlns:r="http://schemas.openxmlformats.org/officeDocument/2006/relationships" xmlns:p="http://schemas.openxmlformats.org/presentationml/2006/main">
   <p:cSld>
     <p:spTree>
@@ -3828,7 +4034,7 @@
           <a:p>
             <a:fld id="{5BCAD085-E8A6-8845-BD4E-CB4CCA059FC4}" type="datetimeFigureOut">
               <a:rPr lang="en-US" smtClean="0"/>
-              <a:t>9/10/26</a:t>
+              <a:t>10/26/2026</a:t>
             </a:fld>
             <a:endParaRPr lang="en-US"/>
           </a:p>
@@ -5816,9 +6022,6 @@
           <a:bodyPr wrap="square" rtlCol="0" anchor="ctr"/>
           <a:lstStyle/>
           <a:p>
-            <a:pPr marL="0" indent="0">
-              <a:buNone/>
-            </a:pPr>
             <a:r>
               <a:rPr lang="en-US" sz="3300" i="1" dirty="0">
                 <a:solidFill>
@@ -5831,7 +6034,7 @@
                 <a:ea typeface="Instrument Serif" pitchFamily="34" charset="-122"/>
                 <a:cs typeface="Instrument Serif" pitchFamily="34" charset="-120"/>
               </a:rPr>
-              <a:t>Module Federation for teams, Suspense for load UX</a:t>
+              <a:t>MF is for teams. Suspense is for users. You need both.</a:t>
             </a:r>
             <a:endParaRPr lang="en-US" sz="3300" dirty="0">
               <a:solidFill>
@@ -5858,8 +6061,8 @@
         </p:nvSpPr>
         <p:spPr>
           <a:xfrm>
-            <a:off x="530352" y="3027145"/>
-            <a:ext cx="11064240" cy="1645920"/>
+            <a:off x="530352" y="3027144"/>
+            <a:ext cx="11064240" cy="1825271"/>
           </a:xfrm>
           <a:prstGeom prst="rect">
             <a:avLst/>
@@ -5871,11 +6074,10 @@
           <a:bodyPr wrap="square" rtlCol="0" anchor="t"/>
           <a:lstStyle/>
           <a:p>
-            <a:pPr marL="0" indent="0" algn="l">
+            <a:pPr>
               <a:lnSpc>
                 <a:spcPts val="1750"/>
               </a:lnSpc>
-              <a:buNone/>
             </a:pPr>
             <a:r>
               <a:rPr lang="en-US" sz="2000" dirty="0">
@@ -5889,25 +6091,14 @@
                 <a:ea typeface="IBM Plex Mono" pitchFamily="34" charset="-122"/>
                 <a:cs typeface="Cascadia Code" panose="020B0609020000020004" pitchFamily="49" charset="0"/>
               </a:rPr>
-              <a:t>Without Suspense:  click tab → blank screen → spinner → content</a:t>
-            </a:r>
-            <a:endParaRPr lang="en-US" sz="2000" dirty="0">
-              <a:solidFill>
-                <a:schemeClr val="tx1">
-                  <a:lumMod val="95000"/>
-                  <a:lumOff val="5000"/>
-                </a:schemeClr>
-              </a:solidFill>
-              <a:latin typeface="Cascadia Code" panose="020B0609020000020004" pitchFamily="49" charset="0"/>
-              <a:cs typeface="Cascadia Code" panose="020B0609020000020004" pitchFamily="49" charset="0"/>
-            </a:endParaRPr>
-          </a:p>
-          <a:p>
-            <a:pPr marL="0" indent="0" algn="l">
+              <a:t>Federation without Suspense:  click → blank → spinner → content. </a:t>
+            </a:r>
+          </a:p>
+          <a:p>
+            <a:pPr>
               <a:lnSpc>
                 <a:spcPts val="1750"/>
               </a:lnSpc>
-              <a:buNone/>
             </a:pPr>
             <a:r>
               <a:rPr lang="en-US" sz="2000" dirty="0">
@@ -5921,8 +6112,15 @@
                 <a:ea typeface="IBM Plex Mono" pitchFamily="34" charset="-122"/>
                 <a:cs typeface="Cascadia Code" panose="020B0609020000020004" pitchFamily="49" charset="0"/>
               </a:rPr>
-              <a:t>                   (slow UX even when team ownership is solid)</a:t>
-            </a:r>
+              <a:t>				      Clean ownership, slow-feeling app.</a:t>
+            </a:r>
+          </a:p>
+          <a:p>
+            <a:pPr>
+              <a:lnSpc>
+                <a:spcPts val="1750"/>
+              </a:lnSpc>
+            </a:pPr>
             <a:endParaRPr lang="en-US" sz="2000" dirty="0">
               <a:solidFill>
                 <a:schemeClr val="tx1">
@@ -5931,15 +6129,15 @@
                 </a:schemeClr>
               </a:solidFill>
               <a:latin typeface="Cascadia Code" panose="020B0609020000020004" pitchFamily="49" charset="0"/>
+              <a:ea typeface="IBM Plex Mono" pitchFamily="34" charset="-122"/>
               <a:cs typeface="Cascadia Code" panose="020B0609020000020004" pitchFamily="49" charset="0"/>
             </a:endParaRPr>
           </a:p>
           <a:p>
-            <a:pPr marL="0" indent="0" algn="l">
+            <a:pPr>
               <a:lnSpc>
                 <a:spcPts val="1750"/>
               </a:lnSpc>
-              <a:buNone/>
             </a:pPr>
             <a:endParaRPr lang="en-US" sz="2000" dirty="0">
               <a:solidFill>
@@ -5953,11 +6151,10 @@
             </a:endParaRPr>
           </a:p>
           <a:p>
-            <a:pPr marL="0" indent="0" algn="l">
+            <a:pPr>
               <a:lnSpc>
                 <a:spcPts val="1750"/>
               </a:lnSpc>
-              <a:buNone/>
             </a:pPr>
             <a:r>
               <a:rPr lang="en-US" sz="2000" dirty="0">
@@ -5971,25 +6168,14 @@
                 <a:ea typeface="IBM Plex Mono" pitchFamily="34" charset="-122"/>
                 <a:cs typeface="Cascadia Code" panose="020B0609020000020004" pitchFamily="49" charset="0"/>
               </a:rPr>
-              <a:t>With Suspense:     click tab → skeleton instantly → content resolves</a:t>
-            </a:r>
-            <a:endParaRPr lang="en-US" sz="2000" dirty="0">
-              <a:solidFill>
-                <a:schemeClr val="tx1">
-                  <a:lumMod val="95000"/>
-                  <a:lumOff val="5000"/>
-                </a:schemeClr>
-              </a:solidFill>
-              <a:latin typeface="Cascadia Code" panose="020B0609020000020004" pitchFamily="49" charset="0"/>
-              <a:cs typeface="Cascadia Code" panose="020B0609020000020004" pitchFamily="49" charset="0"/>
-            </a:endParaRPr>
-          </a:p>
-          <a:p>
-            <a:pPr marL="0" indent="0" algn="l">
+              <a:t>With Suspense:                click → skeleton instantly → content when 				      ready. </a:t>
+            </a:r>
+          </a:p>
+          <a:p>
+            <a:pPr>
               <a:lnSpc>
                 <a:spcPts val="1750"/>
               </a:lnSpc>
-              <a:buNone/>
             </a:pPr>
             <a:r>
               <a:rPr lang="en-US" sz="2000" dirty="0">
@@ -6003,7 +6189,7 @@
                 <a:ea typeface="IBM Plex Mono" pitchFamily="34" charset="-122"/>
                 <a:cs typeface="Cascadia Code" panose="020B0609020000020004" pitchFamily="49" charset="0"/>
               </a:rPr>
-              <a:t>                   (each remote owns its loading choreography)</a:t>
+              <a:t>                              And each remote decides when "ready" is.</a:t>
             </a:r>
             <a:endParaRPr lang="en-US" sz="2000" dirty="0">
               <a:solidFill>

--- a/presentation/module-federation.pptx
+++ b/presentation/module-federation.pptx
@@ -421,7 +421,7 @@
           <a:p>
             <a:r>
               <a:rPr lang="en-US" dirty="0"/>
-              <a:t>This is the one people underrate. It isn't about total lines of code — it's about how much of the system a person must hold in their head before they can safely change one line in a codebase.</a:t>
+              <a:t>I think this is underrated or maybe most of you don’t realize. Getting to know the project’s repository isn't about total lines of code — it's about how much of the system a person must hold in their head before they can safely change one line in a codebase.</a:t>
             </a:r>
           </a:p>
           <a:p>
@@ -430,7 +430,7 @@
           <a:p>
             <a:r>
               <a:rPr lang="en-US" dirty="0"/>
-              <a:t>When onboarding a new frontend developer?</a:t>
+              <a:t>When onboarding a new frontend developer? You only have to know one isolated application like the cart here.</a:t>
             </a:r>
             <a:endParaRPr lang="en-GB" dirty="0"/>
           </a:p>
@@ -539,6 +539,9 @@
             </a:r>
           </a:p>
           <a:p>
+            <a:endParaRPr lang="en-US" dirty="0"/>
+          </a:p>
+          <a:p>
             <a:pPr marL="0" marR="0" lvl="0" indent="0" algn="l" defTabSz="914400" rtl="0" eaLnBrk="1" fontAlgn="auto" latinLnBrk="0" hangingPunct="1">
               <a:lnSpc>
                 <a:spcPct val="100000"/>
@@ -558,7 +561,7 @@
             </a:pPr>
             <a:r>
               <a:rPr lang="en-US" sz="1200" dirty="0"/>
-              <a:t>Incremental migration instead of a rewrite</a:t>
+              <a:t>Incremental migration instead of a rewrite.</a:t>
             </a:r>
             <a:endParaRPr lang="en-GB" sz="1200" dirty="0"/>
           </a:p>
@@ -741,7 +744,7 @@
           <a:p>
             <a:r>
               <a:rPr lang="en-GB" dirty="0"/>
-              <a:t>So demo app is this. This is a healthcare app. With some patient records, prescriptions, analytics.</a:t>
+              <a:t>So, the demo app is this. This is a healthcare app. With some patient records, prescriptions, analytics.</a:t>
             </a:r>
           </a:p>
         </p:txBody>
@@ -1085,22 +1088,7 @@
             </a:r>
             <a:r>
               <a:rPr lang="en-US" dirty="0"/>
-              <a:t>, with a router at the edge (a Vercel rewrite, a CloudFront behavior, an nginx </a:t>
-            </a:r>
-            <a:r>
-              <a:rPr lang="en-US" sz="1200" kern="1200" dirty="0" err="1">
-                <a:solidFill>
-                  <a:schemeClr val="tx1"/>
-                </a:solidFill>
-                <a:latin typeface="+mn-lt"/>
-                <a:ea typeface="+mn-ea"/>
-                <a:cs typeface="+mn-cs"/>
-              </a:rPr>
-              <a:t>proxy_pass</a:t>
-            </a:r>
-            <a:r>
-              <a:rPr lang="en-US" dirty="0"/>
-              <a:t>, a Cloudflare Worker) mapping each path to the host where that team deploys, so users stay on one origin while each team still ships on its own schedule. </a:t>
+              <a:t>, with a router at the edge mapping each path to the host where that team deploys, so users stay on one origin while each team still ships on its own schedule. </a:t>
             </a:r>
           </a:p>
           <a:p>
@@ -1295,7 +1283,7 @@
           <a:p>
             <a:r>
               <a:rPr lang="en-US" dirty="0"/>
-              <a:t>Module Federation does not give you Suspense for free. Plenty of teams federate four remotes and still show a blank screen and a spinner every time someone clicks a tab. Clean team ownership, slow user experience.</a:t>
+              <a:t>Module Federation does not give you Suspense for free. You federate four remotes and still show a blank screen and a spinner every time someone clicks a tab. Clean team ownership, slow user experience.</a:t>
             </a:r>
           </a:p>
           <a:p>
@@ -2905,15 +2893,15 @@
           <a:p>
             <a:r>
               <a:rPr lang="en-GB" dirty="0"/>
-              <a:t>And before I end this presentation, I have two things here I want to share. This is important because of our work has changed from writing code to </a:t>
+              <a:t>And for agents. Simply add </a:t>
             </a:r>
             <a:r>
               <a:rPr lang="en-GB" dirty="0" err="1"/>
-              <a:t>vibecoding</a:t>
+              <a:t>AGENTS.md</a:t>
             </a:r>
             <a:r>
               <a:rPr lang="en-GB" dirty="0"/>
-              <a:t> using AI agents making us 20x engineers now.</a:t>
+              <a:t> in each application folder.</a:t>
             </a:r>
           </a:p>
         </p:txBody>
@@ -2999,23 +2987,7 @@
           <a:p>
             <a:r>
               <a:rPr lang="en-GB" dirty="0"/>
-              <a:t>First is, you can nest AGENTS.md files to your different micro frontend apps that’s good for your AI agents. And </a:t>
-            </a:r>
-            <a:r>
-              <a:rPr lang="en-GB" dirty="0" err="1"/>
-              <a:t>Rspack</a:t>
-            </a:r>
-            <a:r>
-              <a:rPr lang="en-GB" dirty="0"/>
-              <a:t> published agent skills that you can use just in case today’s frontier models still don’t have any idea what the </a:t>
-            </a:r>
-            <a:r>
-              <a:rPr lang="en-GB" dirty="0" err="1"/>
-              <a:t>Rspack</a:t>
-            </a:r>
-            <a:r>
-              <a:rPr lang="en-GB" dirty="0"/>
-              <a:t> v2.0 can do.</a:t>
+              <a:t>First is, you can nest AGENTS.md files to your different micro frontend apps that’s good for your AI agents. </a:t>
             </a:r>
           </a:p>
         </p:txBody>
@@ -3424,6 +3396,9 @@
             </a:r>
           </a:p>
           <a:p>
+            <a:endParaRPr lang="en-US" dirty="0"/>
+          </a:p>
+          <a:p>
             <a:pPr marL="0" marR="0" lvl="0" indent="0" algn="l" defTabSz="914400" rtl="0" eaLnBrk="1" fontAlgn="auto" latinLnBrk="0" hangingPunct="1">
               <a:lnSpc>
                 <a:spcPct val="100000"/>
@@ -3693,13 +3668,13 @@
               <a:tabLst/>
               <a:defRPr/>
             </a:pPr>
+            <a:endParaRPr lang="en-US" sz="1200" dirty="0"/>
+          </a:p>
+          <a:p>
             <a:r>
               <a:rPr lang="en-US" sz="1200" dirty="0"/>
-              <a:t>Ownership becomes structural, not cultural</a:t>
-            </a:r>
-            <a:endParaRPr lang="en-GB" sz="1200" dirty="0"/>
-          </a:p>
-          <a:p>
+              <a:t>Structure in code ownership</a:t>
+            </a:r>
             <a:endParaRPr lang="en-GB" dirty="0"/>
           </a:p>
         </p:txBody>
@@ -3794,7 +3769,7 @@
           <a:p>
             <a:r>
               <a:rPr lang="en-US" dirty="0"/>
-              <a:t>Down below, each part ships separately, so using Catalog's code means adding a dependency or calling an API. That is a real change in a real file, and a reviewer will see it. </a:t>
+              <a:t>Down below with the green, each part ships separately, so using Catalog's code means adding a dependency or calling an API. That is a real change in a real file, and a reviewer will see it. </a:t>
             </a:r>
           </a:p>
           <a:p>
@@ -3803,7 +3778,15 @@
           <a:p>
             <a:r>
               <a:rPr lang="en-US" dirty="0"/>
-              <a:t>Before, crossing a boundary was invisible. </a:t>
+              <a:t>Before doing </a:t>
+            </a:r>
+            <a:r>
+              <a:rPr lang="en-US" dirty="0" err="1"/>
+              <a:t>microfrontends</a:t>
+            </a:r>
+            <a:r>
+              <a:rPr lang="en-US" dirty="0"/>
+              <a:t>, crossing a boundary was invisible. </a:t>
             </a:r>
           </a:p>
           <a:p>
@@ -3812,7 +3795,15 @@
           <a:p>
             <a:r>
               <a:rPr lang="en-US" dirty="0"/>
-              <a:t>After, it is visible. </a:t>
+              <a:t>After having </a:t>
+            </a:r>
+            <a:r>
+              <a:rPr lang="en-US" dirty="0" err="1"/>
+              <a:t>microfrontends</a:t>
+            </a:r>
+            <a:r>
+              <a:rPr lang="en-US" dirty="0"/>
+              <a:t>, it is visible. </a:t>
             </a:r>
           </a:p>
           <a:p>
@@ -3927,6 +3918,9 @@
               <a:rPr lang="en-US" dirty="0"/>
               <a:t>Third reason.</a:t>
             </a:r>
+          </a:p>
+          <a:p>
+            <a:endParaRPr lang="en-US" dirty="0"/>
           </a:p>
           <a:p>
             <a:pPr marL="0" marR="0" lvl="0" indent="0" algn="l" defTabSz="914400" rtl="0" eaLnBrk="1" fontAlgn="auto" latinLnBrk="0" hangingPunct="1">
@@ -4034,7 +4028,7 @@
           <a:p>
             <a:fld id="{5BCAD085-E8A6-8845-BD4E-CB4CCA059FC4}" type="datetimeFigureOut">
               <a:rPr lang="en-US" smtClean="0"/>
-              <a:t>10/26/2026</a:t>
+              <a:t>10/30/26</a:t>
             </a:fld>
             <a:endParaRPr lang="en-US"/>
           </a:p>
@@ -5979,7 +5973,7 @@
 </file>
 
 <file path=ppt/slides/slide18.xml><?xml version="1.0" encoding="utf-8"?>
-<p:sld xmlns:a="http://schemas.openxmlformats.org/drawingml/2006/main" xmlns:r="http://schemas.openxmlformats.org/officeDocument/2006/relationships" xmlns:p="http://schemas.openxmlformats.org/presentationml/2006/main">
+<p:sld xmlns:a="http://schemas.openxmlformats.org/drawingml/2006/main" xmlns:r="http://schemas.openxmlformats.org/officeDocument/2006/relationships" xmlns:p="http://schemas.openxmlformats.org/presentationml/2006/main" show="0">
   <p:cSld>
     <p:spTree>
       <p:nvGrpSpPr>
@@ -6218,7 +6212,7 @@
 </file>
 
 <file path=ppt/slides/slide19.xml><?xml version="1.0" encoding="utf-8"?>
-<p:sld xmlns:a="http://schemas.openxmlformats.org/drawingml/2006/main" xmlns:r="http://schemas.openxmlformats.org/officeDocument/2006/relationships" xmlns:p="http://schemas.openxmlformats.org/presentationml/2006/main">
+<p:sld xmlns:a="http://schemas.openxmlformats.org/drawingml/2006/main" xmlns:r="http://schemas.openxmlformats.org/officeDocument/2006/relationships" xmlns:p="http://schemas.openxmlformats.org/presentationml/2006/main" show="0">
   <p:cSld>
     <p:spTree>
       <p:nvGrpSpPr>
@@ -7252,7 +7246,7 @@
 </file>
 
 <file path=ppt/slides/slide24.xml><?xml version="1.0" encoding="utf-8"?>
-<p:sld xmlns:a="http://schemas.openxmlformats.org/drawingml/2006/main" xmlns:r="http://schemas.openxmlformats.org/officeDocument/2006/relationships" xmlns:p="http://schemas.openxmlformats.org/presentationml/2006/main">
+<p:sld xmlns:a="http://schemas.openxmlformats.org/drawingml/2006/main" xmlns:r="http://schemas.openxmlformats.org/officeDocument/2006/relationships" xmlns:p="http://schemas.openxmlformats.org/presentationml/2006/main" show="0">
   <p:cSld>
     <p:spTree>
       <p:nvGrpSpPr>
@@ -8929,7 +8923,7 @@
 </file>
 
 <file path=ppt/slides/slide3.xml><?xml version="1.0" encoding="utf-8"?>
-<p:sld xmlns:a="http://schemas.openxmlformats.org/drawingml/2006/main" xmlns:r="http://schemas.openxmlformats.org/officeDocument/2006/relationships" xmlns:p="http://schemas.openxmlformats.org/presentationml/2006/main">
+<p:sld xmlns:a="http://schemas.openxmlformats.org/drawingml/2006/main" xmlns:r="http://schemas.openxmlformats.org/officeDocument/2006/relationships" xmlns:p="http://schemas.openxmlformats.org/presentationml/2006/main" show="0">
   <p:cSld>
     <p:spTree>
       <p:nvGrpSpPr>
@@ -9467,7 +9461,7 @@
 </file>
 
 <file path=ppt/slides/slide33.xml><?xml version="1.0" encoding="utf-8"?>
-<p:sld xmlns:a="http://schemas.openxmlformats.org/drawingml/2006/main" xmlns:r="http://schemas.openxmlformats.org/officeDocument/2006/relationships" xmlns:p="http://schemas.openxmlformats.org/presentationml/2006/main">
+<p:sld xmlns:a="http://schemas.openxmlformats.org/drawingml/2006/main" xmlns:r="http://schemas.openxmlformats.org/officeDocument/2006/relationships" xmlns:p="http://schemas.openxmlformats.org/presentationml/2006/main" show="0">
   <p:cSld>
     <p:spTree>
       <p:nvGrpSpPr>
@@ -10025,7 +10019,7 @@
         <p:spPr>
           <a:xfrm>
             <a:off x="522514" y="391886"/>
-            <a:ext cx="8292014" cy="646331"/>
+            <a:ext cx="5461367" cy="646331"/>
           </a:xfrm>
           <a:prstGeom prst="rect">
             <a:avLst/>
@@ -10040,7 +10034,7 @@
           <a:p>
             <a:r>
               <a:rPr lang="en-US" sz="3600" dirty="0"/>
-              <a:t>Ownership becomes structural, not cultural</a:t>
+              <a:t>Structure in code ownership</a:t>
             </a:r>
             <a:endParaRPr lang="en-GB" sz="3600" dirty="0"/>
           </a:p>
